--- a/it/slides/10-Architettura_dei_Calcolatori-Elettronica-Lab.pptx
+++ b/it/slides/10-Architettura_dei_Calcolatori-Elettronica-Lab.pptx
@@ -120,31 +120,31 @@
   <p:extLst>
     <p:ext uri="{521415D9-36F7-43E2-AB2F-B90AF26B5E84}">
       <p14:sectionLst xmlns:p14="http://schemas.microsoft.com/office/powerpoint/2010/main">
-        <p14:section name="Apertura" id="{d8d7267b-5d96-7576-d8b4-9ded4cb6881b}">
+        <p14:section name="Apertura" id="{f741edbe-807b-8edb-d945-aacb1b4809b7}">
           <p14:sldIdLst>
             <p14:sldId id="256"/>
             <p14:sldId id="257"/>
           </p14:sldIdLst>
         </p14:section>
-        <p14:section name="Riscaldamento sulla macchina" id="{9eaa527e-8dc4-e199-843e-1f745f05f0a9}">
+        <p14:section name="Riscaldamento sulla macchina" id="{63e67647-15ac-2ab9-e05c-f8d7a1619a01}">
           <p14:sldIdLst>
             <p14:sldId id="258"/>
           </p14:sldIdLst>
         </p14:section>
-        <p14:section name="Ritorno alla macchina" id="{44addf8a-4e47-21c3-544e-b90400fb9d81}">
+        <p14:section name="Ritorno alla macchina" id="{2c407f57-e1c9-e3ac-9062-85b96dc0ed63}">
           <p14:sldIdLst>
             <p14:sldId id="259"/>
             <p14:sldId id="260"/>
           </p14:sldIdLst>
         </p14:section>
-        <p14:section name="Il programma completo" id="{2db9b1f2-db08-9ebb-6d59-2ab6d6f4f886}">
+        <p14:section name="Il programma completo" id="{bc458aaf-d1a1-a3d8-80de-d3edb8ca34ef}">
           <p14:sldIdLst>
             <p14:sldId id="261"/>
             <p14:sldId id="262"/>
             <p14:sldId id="263"/>
           </p14:sldIdLst>
         </p14:section>
-        <p14:section name="Eseguire e provare" id="{9e506043-99dd-0150-6ca2-ab250ea583c1}">
+        <p14:section name="Eseguire e provare" id="{c2f5cc5b-2361-8470-011e-b64e215eac8a}">
           <p14:sldIdLst>
             <p14:sldId id="264"/>
             <p14:sldId id="265"/>
@@ -153,7 +153,7 @@
             <p14:sldId id="268"/>
           </p14:sldIdLst>
         </p14:section>
-        <p14:section name="Esercizi" id="{f279c8a9-19df-8a26-bb98-444a1891c04d}">
+        <p14:section name="Esercizi" id="{f35a747b-883b-4a9b-8ef0-0b35d3dc2bae}">
           <p14:sldIdLst>
             <p14:sldId id="269"/>
           </p14:sldIdLst>

--- a/it/slides/10-Architettura_dei_Calcolatori-Elettronica-Lab.pptx
+++ b/it/slides/10-Architettura_dei_Calcolatori-Elettronica-Lab.pptx
@@ -120,31 +120,31 @@
   <p:extLst>
     <p:ext uri="{521415D9-36F7-43E2-AB2F-B90AF26B5E84}">
       <p14:sectionLst xmlns:p14="http://schemas.microsoft.com/office/powerpoint/2010/main">
-        <p14:section name="Apertura" id="{f741edbe-807b-8edb-d945-aacb1b4809b7}">
+        <p14:section name="Apertura" id="{5c5ebd2a-583f-6627-74a7-15773ac3c306}">
           <p14:sldIdLst>
             <p14:sldId id="256"/>
             <p14:sldId id="257"/>
           </p14:sldIdLst>
         </p14:section>
-        <p14:section name="Riscaldamento sulla macchina" id="{63e67647-15ac-2ab9-e05c-f8d7a1619a01}">
+        <p14:section name="Riscaldamento sulla macchina" id="{cc86c365-7a16-b734-35a9-4347010c33e5}">
           <p14:sldIdLst>
             <p14:sldId id="258"/>
           </p14:sldIdLst>
         </p14:section>
-        <p14:section name="Ritorno alla macchina" id="{2c407f57-e1c9-e3ac-9062-85b96dc0ed63}">
+        <p14:section name="Ritorno alla macchina" id="{c1ff2335-daf7-bb5e-627b-b7aafa27cb0e}">
           <p14:sldIdLst>
             <p14:sldId id="259"/>
             <p14:sldId id="260"/>
           </p14:sldIdLst>
         </p14:section>
-        <p14:section name="Il programma completo" id="{bc458aaf-d1a1-a3d8-80de-d3edb8ca34ef}">
+        <p14:section name="Il programma completo" id="{4bf5cf08-c5c9-a009-24ca-0085aa7ab215}">
           <p14:sldIdLst>
             <p14:sldId id="261"/>
             <p14:sldId id="262"/>
             <p14:sldId id="263"/>
           </p14:sldIdLst>
         </p14:section>
-        <p14:section name="Eseguire e provare" id="{c2f5cc5b-2361-8470-011e-b64e215eac8a}">
+        <p14:section name="Eseguire e provare" id="{0e22512a-c93f-fab8-cbc1-30931f2637a9}">
           <p14:sldIdLst>
             <p14:sldId id="264"/>
             <p14:sldId id="265"/>
@@ -153,7 +153,7 @@
             <p14:sldId id="268"/>
           </p14:sldIdLst>
         </p14:section>
-        <p14:section name="Esercizi" id="{f35a747b-883b-4a9b-8ef0-0b35d3dc2bae}">
+        <p14:section name="Esercizi" id="{535174f1-1381-cb84-504c-edd68c7c1f73}">
           <p14:sldIdLst>
             <p14:sldId id="269"/>
           </p14:sldIdLst>
@@ -564,7 +564,9 @@
               <a:rPr lang="en-US" dirty="0"/>
               <a:t>Questa è la presentazione del codice della Lezione 10. Mentre la presentazione della lezione sviluppa i concetti, questa raccoglie tutto ciò che si scrive e si esegue: ogni listato con il suo commento, il programma completo della lezione, il risultato che deve produrre, e la procedura per provarlo su ciascuno dei tre host. Le due presentazioni vanno lette insieme: i concetti spiegano il codice, e il codice dà ai concetti una conseguenza osservabile.
 Stato di apprendimento: DA COMPRENDERE OGGI, alla fine di questa lezione lo spiegate, lo seguite passo passo e lo applicate da soli; DA UTILIZZARE OGGI, oggi seguite e usate la ricetta; come funziona dentro si spiega più avanti, o non fa parte del corso; DA COMPRENDERE PIÙ AVANTI, riconoscete il nome e lo scopo; lo spiega una lezione successiva. Una slide senza etichetta è contesto: una storia, un esempio, una domanda, un esercizio.
-Stato di apprendimento di questa lezione. DA COMPRENDERE OGGI: gli ingressi con pull-up; tensione, corrente, legge di Ohm; il transistor come interruttore; dai volt ai bit; le porte CMOS. DA UTILIZZARE OGGI: il programma completo, gli strumenti di PRG32 (si usa, non si studia, in questo corso). DA COMPRENDERE PIÙ AVANTI: il clock (Lezione 13). Una slide senza etichetta è contesto: una storia, un esempio, una domanda, un esercizio.</a:t>
+Stato di apprendimento di questa lezione. DA COMPRENDERE OGGI: gli ingressi con pull-up; tensione, corrente, legge di Ohm; il transistor come interruttore; dai volt ai bit; le porte CMOS. DA UTILIZZARE OGGI: il programma completo, gli strumenti di PRG32 (si usa, non si studia, in questo corso). DA COMPRENDERE PIÙ AVANTI: il clock (Lezione 13). Una slide senza etichetta è contesto: una storia, un esempio, una domanda, un esercizio.
+Percorso. I risultati di oggi: (1) spiegare come un transistor MOS funziona da interruttore e come CMOS costruisce una porta; (2) leggere livelli logici e margini di rumore dalle tensioni; (3) dimensionare la resistenza di un LED e spiegare il pull-up di un pulsante. Si appoggia su: solo ciò che ha preparato la Lezione 01. Prossimo passo: Lezione 11, Macchine combinatorie.
+Ponte. Nella Lezione 02 il contatore sopravviveva da un frame all'altro in memoria, non in un registro. Oggi una cella di memoria costa circa 6 transistor e un flip-flop circa 20: ricordare un bit è un circuito. La Lezione 13 mostra come latch e flip-flop conservano un bit. Richiamo: Dove abitava il contatore della Lezione 02 tra due frame, e perché non in t1?</a:t>
             </a:r>
             <a:endParaRPr lang="en-US" dirty="0"/>
           </a:p>
